--- a/templates/posts/november/19-11-2026-thu-li-biochar-organic.pptx
+++ b/templates/posts/november/19-11-2026-thu-li-biochar-organic.pptx
@@ -3516,92 +3516,9 @@
         <p:nvPr/>
       </p:nvGrpSpPr>
       <p:grpSpPr/>
-      <p:sp>
-        <p:nvSpPr>
-          <p:cNvPr id="2" name="Rectangle 1"/>
-          <p:cNvSpPr/>
-          <p:nvPr/>
-        </p:nvSpPr>
-        <p:spPr>
-          <a:xfrm>
-            <a:off x="571500" y="381000"/>
-            <a:ext cx="10287000" cy="5210175"/>
-          </a:xfrm>
-          <a:prstGeom prst="rect">
-            <a:avLst/>
-          </a:prstGeom>
-          <a:solidFill>
-            <a:srgbClr val="D9D4C7"/>
-          </a:solidFill>
-          <a:ln>
-            <a:noFill/>
-          </a:ln>
-          <a:effectLst/>
-        </p:spPr>
-        <p:style>
-          <a:lnRef idx="1">
-            <a:schemeClr val="accent1"/>
-          </a:lnRef>
-          <a:fillRef idx="3">
-            <a:schemeClr val="accent1"/>
-          </a:fillRef>
-          <a:effectRef idx="2">
-            <a:schemeClr val="accent1"/>
-          </a:effectRef>
-          <a:fontRef idx="minor">
-            <a:schemeClr val="lt1"/>
-          </a:fontRef>
-        </p:style>
-        <p:txBody>
-          <a:bodyPr rtlCol="0" anchor="ctr"/>
-          <a:lstStyle/>
-          <a:p>
-            <a:pPr algn="ctr"/>
-          </a:p>
-        </p:txBody>
-      </p:sp>
-      <p:sp>
-        <p:nvSpPr>
-          <p:cNvPr id="3" name="TextBox 2"/>
-          <p:cNvSpPr txBox="1"/>
-          <p:nvPr/>
-        </p:nvSpPr>
-        <p:spPr>
-          <a:xfrm>
-            <a:off x="857250" y="381000"/>
-            <a:ext cx="9715500" cy="5210175"/>
-          </a:xfrm>
-          <a:prstGeom prst="rect">
-            <a:avLst/>
-          </a:prstGeom>
-          <a:noFill/>
-        </p:spPr>
-        <p:txBody>
-          <a:bodyPr wrap="square" lIns="0" rIns="0" tIns="0" bIns="0" anchor="ctr">
-            <a:spAutoFit/>
-          </a:bodyPr>
-          <a:lstStyle/>
-          <a:p>
-            <a:pPr algn="ctr">
-              <a:lnSpc>
-                <a:spcPct val="120000"/>
-              </a:lnSpc>
-            </a:pPr>
-            <a:r>
-              <a:rPr sz="2400" b="1" i="0">
-                <a:solidFill>
-                  <a:srgbClr val="4A463F"/>
-                </a:solidFill>
-                <a:latin typeface="Montserrat"/>
-              </a:rPr>
-              <a:t>COLLAGE: biochar-compost-1.png</a:t>
-            </a:r>
-          </a:p>
-        </p:txBody>
-      </p:sp>
       <p:pic>
         <p:nvPicPr>
-          <p:cNvPr id="4" name="Picture 3" descr="foundation-logo-white.png"/>
+          <p:cNvPr id="2" name="Picture 1" descr="trim-biochar-compost-1.png"/>
           <p:cNvPicPr>
             <a:picLocks noChangeAspect="1"/>
           </p:cNvPicPr>
@@ -3609,6 +3526,30 @@
         </p:nvPicPr>
         <p:blipFill>
           <a:blip r:embed="rId3"/>
+          <a:stretch>
+            <a:fillRect/>
+          </a:stretch>
+        </p:blipFill>
+        <p:spPr>
+          <a:xfrm>
+            <a:off x="3120222" y="381000"/>
+            <a:ext cx="5189554" cy="5210175"/>
+          </a:xfrm>
+          <a:prstGeom prst="rect">
+            <a:avLst/>
+          </a:prstGeom>
+        </p:spPr>
+      </p:pic>
+      <p:pic>
+        <p:nvPicPr>
+          <p:cNvPr id="3" name="Picture 2" descr="foundation-logo-white.png"/>
+          <p:cNvPicPr>
+            <a:picLocks noChangeAspect="1"/>
+          </p:cNvPicPr>
+          <p:nvPr/>
+        </p:nvPicPr>
+        <p:blipFill>
+          <a:blip r:embed="rId4"/>
           <a:stretch>
             <a:fillRect/>
           </a:stretch>
